--- a/09_주간보고/2026-10-14/주간보고_10_14_이지용.pptx
+++ b/09_주간보고/2026-10-14/주간보고_10_14_이지용.pptx
@@ -13992,42 +13992,35 @@
             <a:pPr lvl="1"/>
             <a:r>
               <a:rPr sz="1500"/>
-              <a:t>IEIE 2026 Fall Conference paper (undergraduate paper competition)</a:t>
+              <a:t>Capstone project (smart factory stacking) in simulation</a:t>
             </a:r>
           </a:p>
           <a:p>
             <a:pPr lvl="2"/>
             <a:r>
               <a:rPr sz="1300"/>
-              <a:t>I rebuilt the stacking experiments in MuJoCo because the robot arm was broken</a:t>
+              <a:t>I rebuilt our capstone system in MuJoCo because the robot arm was broken</a:t>
+            </a:r>
+          </a:p>
+          <a:p>
+            <a:pPr lvl="3"/>
+            <a:r>
+              <a:rPr sz="1150"/>
+              <a:t>It used the same SO-101 arm, scale, blue bins and cameras as the capstone</a:t>
             </a:r>
           </a:p>
           <a:p>
             <a:pPr lvl="2"/>
             <a:r>
               <a:rPr sz="1300"/>
-              <a:t>I found three demonstration rules, and 3-stage success rose from 28% to 99.0% (198/200)</a:t>
-            </a:r>
-          </a:p>
-          <a:p>
-            <a:pPr lvl="3"/>
-            <a:r>
-              <a:rPr sz="1150"/>
-              <a:t>The rules were grasp clearance, the same grasp wall and a short retreat after release</a:t>
+              <a:t>I trained ACT, and the robot stacked three bins with 99.0% success</a:t>
             </a:r>
           </a:p>
           <a:p>
             <a:pPr lvl="2"/>
             <a:r>
               <a:rPr sz="1300"/>
-              <a:t>I proposed a pre-training consistency check (gap of wrist angles at grasp)</a:t>
-            </a:r>
-          </a:p>
-          <a:p>
-            <a:pPr lvl="2"/>
-            <a:r>
-              <a:rPr sz="1300"/>
-              <a:t>I have revised both papers following your comments</a:t>
+              <a:t>I ran it in various environments, including lighting changes (88–100%)</a:t>
             </a:r>
           </a:p>
         </p:txBody>
@@ -14048,7 +14041,7 @@
         </p:nvSpPr>
         <p:spPr bwMode="auto">
           <a:xfrm>
-            <a:off x="228600" y="5194808"/>
+            <a:off x="228600" y="5409227"/>
             <a:ext cx="8732520" cy="914400"/>
           </a:xfrm>
           <a:prstGeom prst="rect">
@@ -14230,21 +14223,21 @@
             <a:pPr lvl="1"/>
             <a:r>
               <a:rPr sz="1500"/>
-              <a:t>I will submit the proceedings and blind review papers by Oct. 19</a:t>
+              <a:t>I will submit the paper for the undergraduate paper competition by Oct. 19</a:t>
             </a:r>
           </a:p>
           <a:p>
             <a:pPr lvl="1"/>
             <a:r>
               <a:rPr sz="1500"/>
-              <a:t>I will submit the RISE support documents (registration fee, business trip)</a:t>
+              <a:t>I will submit the RISE support documents</a:t>
             </a:r>
           </a:p>
         </p:txBody>
       </p:sp>
       <p:pic>
         <p:nvPicPr>
-          <p:cNvPr id="7" name="Picture 6" descr="weekly_1014_strip.png"/>
+          <p:cNvPr id="7" name="Picture 6" descr="weekly_1014_envs.png"/>
           <p:cNvPicPr>
             <a:picLocks noChangeAspect="1"/>
           </p:cNvPicPr>
@@ -14258,8 +14251,8 @@
         </p:blipFill>
         <p:spPr>
           <a:xfrm>
-            <a:off x="685800" y="3017520"/>
-            <a:ext cx="7772400" cy="2159000"/>
+            <a:off x="1920240" y="2514600"/>
+            <a:ext cx="5303520" cy="2876339"/>
           </a:xfrm>
           <a:prstGeom prst="rect">
             <a:avLst/>
